--- a/livro_ia_educacao/saida/pptx/Cap24_slides.pptx
+++ b/livro_ia_educacao/saida/pptx/Cap24_slides.pptx
@@ -10401,11 +10401,11 @@
         <p:spPr>
           <a:xfrm>
             <a:off x="548640" y="1417320"/>
-            <a:ext cx="11064240" cy="762000"/>
+            <a:ext cx="11064240" cy="682752"/>
           </a:xfrm>
           <a:prstGeom prst="roundRect">
             <a:avLst>
-              <a:gd name="adj" fmla="val 14400"/>
+              <a:gd name="adj" fmla="val 16071"/>
             </a:avLst>
           </a:prstGeom>
           <a:solidFill>
@@ -10432,7 +10432,7 @@
         <p:spPr>
           <a:xfrm>
             <a:off x="731520" y="1417320"/>
-            <a:ext cx="548640" cy="762000"/>
+            <a:ext cx="548640" cy="682752"/>
           </a:xfrm>
           <a:prstGeom prst="rect">
             <a:avLst/>
@@ -10468,7 +10468,7 @@
         <p:spPr>
           <a:xfrm>
             <a:off x="1463040" y="1417320"/>
-            <a:ext cx="9966960" cy="762000"/>
+            <a:ext cx="9966960" cy="682752"/>
           </a:xfrm>
           <a:prstGeom prst="rect">
             <a:avLst/>
@@ -10503,12 +10503,12 @@
         </p:nvSpPr>
         <p:spPr>
           <a:xfrm>
-            <a:off x="548640" y="2289048"/>
-            <a:ext cx="11064240" cy="762000"/>
+            <a:off x="548640" y="2209800"/>
+            <a:ext cx="11064240" cy="682752"/>
           </a:xfrm>
           <a:prstGeom prst="roundRect">
             <a:avLst>
-              <a:gd name="adj" fmla="val 14400"/>
+              <a:gd name="adj" fmla="val 16071"/>
             </a:avLst>
           </a:prstGeom>
           <a:solidFill>
@@ -10534,8 +10534,8 @@
         </p:nvSpPr>
         <p:spPr>
           <a:xfrm>
-            <a:off x="731520" y="2289048"/>
-            <a:ext cx="548640" cy="762000"/>
+            <a:off x="731520" y="2209800"/>
+            <a:ext cx="548640" cy="682752"/>
           </a:xfrm>
           <a:prstGeom prst="rect">
             <a:avLst/>
@@ -10570,8 +10570,8 @@
         </p:nvSpPr>
         <p:spPr>
           <a:xfrm>
-            <a:off x="1463040" y="2289048"/>
-            <a:ext cx="9966960" cy="762000"/>
+            <a:off x="1463040" y="2209800"/>
+            <a:ext cx="9966960" cy="682752"/>
           </a:xfrm>
           <a:prstGeom prst="rect">
             <a:avLst/>
@@ -10606,12 +10606,12 @@
         </p:nvSpPr>
         <p:spPr>
           <a:xfrm>
-            <a:off x="548640" y="3160776"/>
-            <a:ext cx="11064240" cy="762000"/>
+            <a:off x="548640" y="3002280"/>
+            <a:ext cx="11064240" cy="682752"/>
           </a:xfrm>
           <a:prstGeom prst="roundRect">
             <a:avLst>
-              <a:gd name="adj" fmla="val 14400"/>
+              <a:gd name="adj" fmla="val 16071"/>
             </a:avLst>
           </a:prstGeom>
           <a:solidFill>
@@ -10637,8 +10637,8 @@
         </p:nvSpPr>
         <p:spPr>
           <a:xfrm>
-            <a:off x="731520" y="3160776"/>
-            <a:ext cx="548640" cy="762000"/>
+            <a:off x="731520" y="3002280"/>
+            <a:ext cx="548640" cy="682752"/>
           </a:xfrm>
           <a:prstGeom prst="rect">
             <a:avLst/>
@@ -10673,8 +10673,8 @@
         </p:nvSpPr>
         <p:spPr>
           <a:xfrm>
-            <a:off x="1463040" y="3160776"/>
-            <a:ext cx="9966960" cy="762000"/>
+            <a:off x="1463040" y="3002280"/>
+            <a:ext cx="9966960" cy="682752"/>
           </a:xfrm>
           <a:prstGeom prst="rect">
             <a:avLst/>
@@ -10709,12 +10709,12 @@
         </p:nvSpPr>
         <p:spPr>
           <a:xfrm>
-            <a:off x="548640" y="4032504"/>
-            <a:ext cx="11064240" cy="762000"/>
+            <a:off x="548640" y="3794760"/>
+            <a:ext cx="11064240" cy="682752"/>
           </a:xfrm>
           <a:prstGeom prst="roundRect">
             <a:avLst>
-              <a:gd name="adj" fmla="val 14400"/>
+              <a:gd name="adj" fmla="val 16071"/>
             </a:avLst>
           </a:prstGeom>
           <a:solidFill>
@@ -10740,8 +10740,8 @@
         </p:nvSpPr>
         <p:spPr>
           <a:xfrm>
-            <a:off x="731520" y="4032504"/>
-            <a:ext cx="548640" cy="762000"/>
+            <a:off x="731520" y="3794760"/>
+            <a:ext cx="548640" cy="682752"/>
           </a:xfrm>
           <a:prstGeom prst="rect">
             <a:avLst/>
@@ -10776,8 +10776,8 @@
         </p:nvSpPr>
         <p:spPr>
           <a:xfrm>
-            <a:off x="1463040" y="4032504"/>
-            <a:ext cx="9966960" cy="762000"/>
+            <a:off x="1463040" y="3794760"/>
+            <a:ext cx="9966960" cy="682752"/>
           </a:xfrm>
           <a:prstGeom prst="rect">
             <a:avLst/>
@@ -10812,12 +10812,12 @@
         </p:nvSpPr>
         <p:spPr>
           <a:xfrm>
-            <a:off x="548640" y="4904232"/>
-            <a:ext cx="11064240" cy="762000"/>
+            <a:off x="548640" y="4587240"/>
+            <a:ext cx="11064240" cy="682752"/>
           </a:xfrm>
           <a:prstGeom prst="roundRect">
             <a:avLst>
-              <a:gd name="adj" fmla="val 14400"/>
+              <a:gd name="adj" fmla="val 16071"/>
             </a:avLst>
           </a:prstGeom>
           <a:solidFill>
@@ -10843,8 +10843,8 @@
         </p:nvSpPr>
         <p:spPr>
           <a:xfrm>
-            <a:off x="731520" y="4904232"/>
-            <a:ext cx="548640" cy="762000"/>
+            <a:off x="731520" y="4587240"/>
+            <a:ext cx="548640" cy="682752"/>
           </a:xfrm>
           <a:prstGeom prst="rect">
             <a:avLst/>
@@ -10879,8 +10879,8 @@
         </p:nvSpPr>
         <p:spPr>
           <a:xfrm>
-            <a:off x="1463040" y="4904232"/>
-            <a:ext cx="9966960" cy="762000"/>
+            <a:off x="1463040" y="4587240"/>
+            <a:ext cx="9966960" cy="682752"/>
           </a:xfrm>
           <a:prstGeom prst="rect">
             <a:avLst/>
@@ -10915,12 +10915,12 @@
         </p:nvSpPr>
         <p:spPr>
           <a:xfrm>
-            <a:off x="548640" y="5775960"/>
-            <a:ext cx="11064240" cy="762000"/>
+            <a:off x="548640" y="5379720"/>
+            <a:ext cx="11064240" cy="682752"/>
           </a:xfrm>
           <a:prstGeom prst="roundRect">
             <a:avLst>
-              <a:gd name="adj" fmla="val 14400"/>
+              <a:gd name="adj" fmla="val 16071"/>
             </a:avLst>
           </a:prstGeom>
           <a:solidFill>
@@ -10946,8 +10946,8 @@
         </p:nvSpPr>
         <p:spPr>
           <a:xfrm>
-            <a:off x="731520" y="5775960"/>
-            <a:ext cx="548640" cy="762000"/>
+            <a:off x="731520" y="5379720"/>
+            <a:ext cx="548640" cy="682752"/>
           </a:xfrm>
           <a:prstGeom prst="rect">
             <a:avLst/>
@@ -10982,8 +10982,8 @@
         </p:nvSpPr>
         <p:spPr>
           <a:xfrm>
-            <a:off x="1463040" y="5775960"/>
-            <a:ext cx="9966960" cy="762000"/>
+            <a:off x="1463040" y="5379720"/>
+            <a:ext cx="9966960" cy="682752"/>
           </a:xfrm>
           <a:prstGeom prst="rect">
             <a:avLst/>
